--- a/public/fun/pack/pptx/familypro/가족소개프리미엄_31_우리부부_머스터드네이비.pptx
+++ b/public/fun/pack/pptx/familypro/가족소개프리미엄_31_우리부부_머스터드네이비.pptx
@@ -113,12 +113,12 @@
   <p:extLst>
     <p:ext uri="{521415D9-36F7-43E2-AB2F-B90AF26B5E84}">
       <p14:sectionLst xmlns:p14="http://schemas.microsoft.com/office/powerpoint/2010/main">
-        <p14:section name="시작" id="{13C75D17-24BC-47C2-8C87-F555A83CCE08}">
+        <p14:section name="시작" id="{BB8D5F54-4F1D-4B68-8091-05A2AD21C7E0}">
           <p14:sldIdLst>
             <p14:sldId id="256"/>
           </p14:sldIdLst>
         </p14:section>
-        <p14:section name="본문" id="{1821DDA5-242A-4F34-8797-2CE9CE3963CD}">
+        <p14:section name="본문" id="{55F4028C-AF1F-4DC2-9935-AE9D0F6EC20F}">
           <p14:sldIdLst>
             <p14:sldId id="257"/>
             <p14:sldId id="258"/>
@@ -127,7 +127,7 @@
             <p14:sldId id="261"/>
           </p14:sldIdLst>
         </p14:section>
-        <p14:section name="마무리" id="{F8F39942-A3E1-482D-8E96-8ABB81C7ED29}">
+        <p14:section name="마무리" id="{505AB8C7-FCE1-4B5D-A8AD-6EADD05C1B49}">
           <p14:sldIdLst>
             <p14:sldId id="262"/>
           </p14:sldIdLst>
@@ -1568,7 +1568,7 @@
             </a:lvl1pPr>
           </a:lstStyle>
           <a:p>
-            <a:fld id="{F87581CD-86C7-4C84-8503-571B7FEE506A}" type="slidenum">
+            <a:fld id="{45E11FDA-B04B-4CBC-BC24-52653AA7B7FB}" type="slidenum">
               <a:rPr lang="en-US"/>
               <a:t>‹#›</a:t>
             </a:fld>
@@ -2368,7 +2368,7 @@
             </a:lvl1pPr>
           </a:lstStyle>
           <a:p>
-            <a:fld id="{FBECB953-C56F-4929-B543-AF41E2F0330D}" type="slidenum">
+            <a:fld id="{919F6621-6E6C-4429-80EC-9835DCB1CF9A}" type="slidenum">
               <a:rPr lang="en-US"/>
               <a:t>‹#›</a:t>
             </a:fld>
@@ -3121,7 +3121,7 @@
             </a:lvl1pPr>
           </a:lstStyle>
           <a:p>
-            <a:fld id="{9C22D907-93D9-4F0D-A0EC-0437AC7FAE20}" type="slidenum">
+            <a:fld id="{DC749B44-95DF-4E94-A9E6-02F40F2D21BA}" type="slidenum">
               <a:rPr lang="en-US"/>
               <a:t>‹#›</a:t>
             </a:fld>
@@ -4069,7 +4069,7 @@
           <a:p>
             <a:r>
               <a:rPr lang="ko-KR"/>
-              <a:t>우리 부부 · 0000. 00. 00</a:t>
+              <a:t>우리 부부 · 날짜 입력</a:t>
             </a:r>
           </a:p>
         </p:txBody>
@@ -4292,7 +4292,7 @@
           <a:bodyPr/>
           <a:lstStyle/>
           <a:p>
-            <a:fld id="{7B03334A-14DE-4C71-9243-374FE49F1289}" type="slidenum">
+            <a:fld id="{B6CE4AB0-88E9-4474-B2D8-9F28FC406297}" type="slidenum">
               <a:rPr lang="en-US"/>
               <a:t>‹#›</a:t>
             </a:fld>
@@ -4744,7 +4744,7 @@
           <a:bodyPr/>
           <a:lstStyle/>
           <a:p>
-            <a:fld id="{C358DC03-4B3C-4B2A-B0AC-E1B392087D86}" type="slidenum">
+            <a:fld id="{D444CA82-CED6-4A07-AC43-D4322C5ADF16}" type="slidenum">
               <a:rPr lang="en-US"/>
               <a:t>‹#›</a:t>
             </a:fld>
@@ -5586,7 +5586,7 @@
           <a:bodyPr/>
           <a:lstStyle/>
           <a:p>
-            <a:fld id="{97203518-AEB6-4FCC-B91B-E26B2BD2CE9B}" type="slidenum">
+            <a:fld id="{5E7C7974-DBA6-4811-891E-B81B7C6FA4AA}" type="slidenum">
               <a:rPr lang="en-US"/>
               <a:t>‹#›</a:t>
             </a:fld>
@@ -6994,7 +6994,7 @@
           <a:bodyPr/>
           <a:lstStyle/>
           <a:p>
-            <a:fld id="{17831A3E-A92A-4ED8-AE0A-90EADA4295CE}" type="slidenum">
+            <a:fld id="{6DB130EA-BB18-4AA7-BCC2-38E5E06EF899}" type="slidenum">
               <a:rPr lang="en-US"/>
               <a:t>‹#›</a:t>
             </a:fld>
@@ -7082,7 +7082,7 @@
           <a:bodyPr/>
           <a:lstStyle/>
           <a:p>
-            <a:fld id="{AD9387E7-9D97-4B73-9577-2C7E297AAD9B}" type="slidenum">
+            <a:fld id="{29CF6829-4252-4A6C-9230-0C5A6A853BF1}" type="slidenum">
               <a:rPr lang="en-US"/>
               <a:t>‹#›</a:t>
             </a:fld>
